--- a/assets/pptx/catalog-141.pptx
+++ b/assets/pptx/catalog-141.pptx
@@ -3253,7 +3253,7 @@
                 <a:ea typeface="Ebrima"/>
                 <a:cs typeface="Ebrima"/>
               </a:rPr>
-              <a:t>አምላክ አለኝ የታመኑትን ሜዳ የማይጥል (2x)</a:t>
+              <a:t>አምላክ አለኝ የታመኑትን ሜዳ የማይጥል 2x</a:t>
             </a:r>
           </a:p>
           <a:p>
@@ -3271,7 +3271,7 @@
                 <a:ea typeface="Ebrima"/>
                 <a:cs typeface="Ebrima"/>
               </a:rPr>
-              <a:t>አምላክ አለኝ የለመኑትን ሜዳ የማይጥል (2x)</a:t>
+              <a:t>አምላክ አለኝ የለመኑትን ሜዳ የማይጥል 2x</a:t>
             </a:r>
           </a:p>
           <a:p>
@@ -3289,7 +3289,7 @@
                 <a:ea typeface="Ebrima"/>
                 <a:cs typeface="Ebrima"/>
               </a:rPr>
-              <a:t>አምላክ አለኝ የሚያመልኩትን ሜዳ የማይጥል (2x)</a:t>
+              <a:t>አምላክ አለኝ የሚያመልኩትን ሜዳ የማይጥል 2x</a:t>
             </a:r>
           </a:p>
           <a:p>
@@ -3307,7 +3307,7 @@
                 <a:ea typeface="Ebrima"/>
                 <a:cs typeface="Ebrima"/>
               </a:rPr>
-              <a:t>አምላክ አለኝ የሚወዱትን ሜዳ የማይጥል (2x)</a:t>
+              <a:t>አምላክ አለኝ የሚወዱትን ሜዳ የማይጥል 2x</a:t>
             </a:r>
           </a:p>
         </p:txBody>
@@ -3374,7 +3374,7 @@
                 <a:ea typeface="Ebrima"/>
                 <a:cs typeface="Ebrima"/>
               </a:rPr>
-              <a:t>አምላክ አለኝ የታመኑትን ሜዳ የማይጥል (2x)</a:t>
+              <a:t>አምላክ አለኝ የታመኑትን ሜዳ የማይጥል 2x</a:t>
             </a:r>
           </a:p>
           <a:p>
@@ -3392,7 +3392,7 @@
                 <a:ea typeface="Ebrima"/>
                 <a:cs typeface="Ebrima"/>
               </a:rPr>
-              <a:t>አምላክ አለኝ የለመኑትን ሜዳ የማይጥል (2x)</a:t>
+              <a:t>አምላክ አለኝ የለመኑትን ሜዳ የማይጥል 2x</a:t>
             </a:r>
           </a:p>
           <a:p>
@@ -3410,7 +3410,7 @@
                 <a:ea typeface="Ebrima"/>
                 <a:cs typeface="Ebrima"/>
               </a:rPr>
-              <a:t>አምላክ አለኝ የሚያመልኩትን ሜዳ የማይጥል (2x)</a:t>
+              <a:t>አምላክ አለኝ የሚያመልኩትን ሜዳ የማይጥል 2x</a:t>
             </a:r>
           </a:p>
           <a:p>
@@ -3428,7 +3428,7 @@
                 <a:ea typeface="Ebrima"/>
                 <a:cs typeface="Ebrima"/>
               </a:rPr>
-              <a:t>አምላክ አለኝ የሚወዱትን ሜዳ የማይጥል (2x)</a:t>
+              <a:t>አምላክ አለኝ የሚወዱትን ሜዳ የማይጥል 2x</a:t>
             </a:r>
           </a:p>
         </p:txBody>
@@ -3531,7 +3531,7 @@
                 <a:ea typeface="Ebrima"/>
                 <a:cs typeface="Ebrima"/>
               </a:rPr>
-              <a:t>አስጨመረልኝ ሞገስ አስደረበልኝ ካባ (2x)</a:t>
+              <a:t>አስጨመረልኝ ሞገስ አስደረበልኝ ካባ 2x</a:t>
             </a:r>
           </a:p>
         </p:txBody>
@@ -3652,7 +3652,7 @@
                 <a:ea typeface="Ebrima"/>
                 <a:cs typeface="Ebrima"/>
               </a:rPr>
-              <a:t>ደርሶ ሳቅ አረገልኝ ሆ (2x)</a:t>
+              <a:t>ደርሶ ሳቅ አረገልኝ ሆ 2x</a:t>
             </a:r>
           </a:p>
         </p:txBody>
@@ -3719,7 +3719,7 @@
                 <a:ea typeface="Ebrima"/>
                 <a:cs typeface="Ebrima"/>
               </a:rPr>
-              <a:t>ያስጥላል በመላ የእኔ ጌታ አውሬ እንዳይበላ (2x)</a:t>
+              <a:t>ያስጥላል በመላ የእኔ ጌታ አውሬ እንዳይበላ 2x</a:t>
             </a:r>
           </a:p>
           <a:p>
@@ -3755,7 +3755,7 @@
                 <a:ea typeface="Ebrima"/>
                 <a:cs typeface="Ebrima"/>
               </a:rPr>
-              <a:t>አለው ምህረትህ ለጸኑት ባለመነሳት (2x)</a:t>
+              <a:t>አለው ምህረትህ ለጸኑት ባለመነሳት 2x</a:t>
             </a:r>
           </a:p>
         </p:txBody>
@@ -3858,7 +3858,7 @@
                 <a:ea typeface="Ebrima"/>
                 <a:cs typeface="Ebrima"/>
               </a:rPr>
-              <a:t>ሃማ ተሰቀለ (2x) [1]</a:t>
+              <a:t>ሃማ ተሰቀለ 2x [1]</a:t>
             </a:r>
           </a:p>
         </p:txBody>
@@ -3943,7 +3943,7 @@
                 <a:ea typeface="Ebrima"/>
                 <a:cs typeface="Ebrima"/>
               </a:rPr>
-              <a:t>እግዜር ለድሆቹ ደራሽ ነው ማለቴ (2x)</a:t>
+              <a:t>እግዜር ለድሆቹ ደራሽ ነው ማለቴ 2x</a:t>
             </a:r>
           </a:p>
           <a:p>
@@ -4064,7 +4064,7 @@
                 <a:ea typeface="Ebrima"/>
                 <a:cs typeface="Ebrima"/>
               </a:rPr>
-              <a:t>ጌታዬ ራራልኛ (2x)</a:t>
+              <a:t>ጌታዬ ራራልኛ 2x</a:t>
             </a:r>
           </a:p>
         </p:txBody>
@@ -4149,7 +4149,7 @@
                 <a:ea typeface="Ebrima"/>
                 <a:cs typeface="Ebrima"/>
               </a:rPr>
-              <a:t>አስጨመረልኝ ሞገስ አስደረበልኝ ካባ (2x)</a:t>
+              <a:t>አስጨመረልኝ ሞገስ አስደረበልኝ ካባ 2x</a:t>
             </a:r>
           </a:p>
           <a:p>
@@ -4185,7 +4185,7 @@
                 <a:ea typeface="Ebrima"/>
                 <a:cs typeface="Ebrima"/>
               </a:rPr>
-              <a:t>አስጨመረልኝ ሞገስ አስደረበልኝ ካባ (2x)</a:t>
+              <a:t>አስጨመረልኝ ሞገስ አስደረበልኝ ካባ 2x</a:t>
             </a:r>
           </a:p>
         </p:txBody>
@@ -4270,7 +4270,7 @@
                 <a:ea typeface="Ebrima"/>
                 <a:cs typeface="Ebrima"/>
               </a:rPr>
-              <a:t>ለእኔም ፀሐይ ወጣልኝ ነጋ ሌቱ ነጋልኝ (2x)</a:t>
+              <a:t>ለእኔም ፀሐይ ወጣልኝ ነጋ ሌቱ ነጋልኝ 2x</a:t>
             </a:r>
           </a:p>
         </p:txBody>
@@ -4373,7 +4373,7 @@
                 <a:ea typeface="Ebrima"/>
                 <a:cs typeface="Ebrima"/>
               </a:rPr>
-              <a:t>ሃማ ተሰቀለ (2x) [1]</a:t>
+              <a:t>ሃማ ተሰቀለ 2x [1]</a:t>
             </a:r>
           </a:p>
         </p:txBody>
@@ -4458,7 +4458,7 @@
                 <a:ea typeface="Ebrima"/>
                 <a:cs typeface="Ebrima"/>
               </a:rPr>
-              <a:t>እግዜር ለደሆቹ ደራሽ ነው ማለቴ (2x)</a:t>
+              <a:t>እግዜር ለደሆቹ ደራሽ ነው ማለቴ 2x</a:t>
             </a:r>
           </a:p>
           <a:p>
@@ -4579,7 +4579,7 @@
                 <a:ea typeface="Ebrima"/>
                 <a:cs typeface="Ebrima"/>
               </a:rPr>
-              <a:t>ጌታዬ ራራልኛ (2x)</a:t>
+              <a:t>ጌታዬ ራራልኛ 2x</a:t>
             </a:r>
           </a:p>
         </p:txBody>
